--- a/ai/src/ppt dataset/Grey Blue Minimalist Modern Presentation .pptx
+++ b/ai/src/ppt dataset/Grey Blue Minimalist Modern Presentation .pptx
@@ -3133,6 +3133,10 @@
             </a:stretch>
           </a:blipFill>
         </p:spPr>
+        <p:txBody>
+          <a:bodyPr/>
+          <a:p/>
+        </p:txBody>
       </p:sp>
       <p:sp>
         <p:nvSpPr>
@@ -3185,6 +3189,10 @@
             </a:stretch>
           </a:blipFill>
         </p:spPr>
+        <p:txBody>
+          <a:bodyPr/>
+          <a:p/>
+        </p:txBody>
       </p:sp>
       <p:sp>
         <p:nvSpPr>
@@ -3237,6 +3245,10 @@
             </a:stretch>
           </a:blipFill>
         </p:spPr>
+        <p:txBody>
+          <a:bodyPr/>
+          <a:p/>
+        </p:txBody>
       </p:sp>
       <p:sp>
         <p:nvSpPr>
@@ -3289,6 +3301,10 @@
             </a:stretch>
           </a:blipFill>
         </p:spPr>
+        <p:txBody>
+          <a:bodyPr/>
+          <a:p/>
+        </p:txBody>
       </p:sp>
       <p:sp>
         <p:nvSpPr>
@@ -3310,25 +3326,7 @@
             <a:spAutoFit/>
           </a:bodyPr>
           <a:lstStyle/>
-          <a:p>
-            <a:pPr algn="ctr">
-              <a:lnSpc>
-                <a:spcPts val="12947"/>
-              </a:lnSpc>
-            </a:pPr>
-            <a:r>
-              <a:rPr lang="en-US" sz="12331">
-                <a:solidFill>
-                  <a:srgbClr val="404C7D"/>
-                </a:solidFill>
-                <a:latin typeface="Alata"/>
-                <a:ea typeface="Alata"/>
-                <a:cs typeface="Alata"/>
-                <a:sym typeface="Alata"/>
-              </a:rPr>
-              <a:t>PRESENTATION </a:t>
-            </a:r>
-          </a:p>
+          <a:p/>
         </p:txBody>
       </p:sp>
       <p:sp>
@@ -3351,25 +3349,7 @@
             <a:spAutoFit/>
           </a:bodyPr>
           <a:lstStyle/>
-          <a:p>
-            <a:pPr algn="l">
-              <a:lnSpc>
-                <a:spcPts val="5168"/>
-              </a:lnSpc>
-            </a:pPr>
-            <a:r>
-              <a:rPr lang="en-US" sz="4922">
-                <a:solidFill>
-                  <a:srgbClr val="404C7D"/>
-                </a:solidFill>
-                <a:latin typeface="Alata"/>
-                <a:ea typeface="Alata"/>
-                <a:cs typeface="Alata"/>
-                <a:sym typeface="Alata"/>
-              </a:rPr>
-              <a:t>by Claudia Alves</a:t>
-            </a:r>
-          </a:p>
+          <a:p/>
         </p:txBody>
       </p:sp>
     </p:spTree>
@@ -3455,6 +3435,10 @@
             </a:stretch>
           </a:blipFill>
         </p:spPr>
+        <p:txBody>
+          <a:bodyPr/>
+          <a:p/>
+        </p:txBody>
       </p:sp>
       <p:sp>
         <p:nvSpPr>
@@ -3507,6 +3491,10 @@
             </a:stretch>
           </a:blipFill>
         </p:spPr>
+        <p:txBody>
+          <a:bodyPr/>
+          <a:p/>
+        </p:txBody>
       </p:sp>
       <p:sp>
         <p:nvSpPr>
@@ -3559,6 +3547,10 @@
             </a:stretch>
           </a:blipFill>
         </p:spPr>
+        <p:txBody>
+          <a:bodyPr/>
+          <a:p/>
+        </p:txBody>
       </p:sp>
       <p:sp>
         <p:nvSpPr>
@@ -3611,6 +3603,10 @@
             </a:stretch>
           </a:blipFill>
         </p:spPr>
+        <p:txBody>
+          <a:bodyPr/>
+          <a:p/>
+        </p:txBody>
       </p:sp>
       <p:sp>
         <p:nvSpPr>
@@ -3632,32 +3628,7 @@
             <a:spAutoFit/>
           </a:bodyPr>
           <a:lstStyle/>
-          <a:p>
-            <a:pPr algn="just">
-              <a:lnSpc>
-                <a:spcPts val="3360"/>
-              </a:lnSpc>
-            </a:pPr>
-            <a:r>
-              <a:rPr lang="en-US" sz="3200">
-                <a:solidFill>
-                  <a:srgbClr val="404C7D"/>
-                </a:solidFill>
-                <a:latin typeface="Alata"/>
-                <a:ea typeface="Alata"/>
-                <a:cs typeface="Alata"/>
-                <a:sym typeface="Alata"/>
-              </a:rPr>
-              <a:t>Lorem ipsum dolor sit amet, consectetur adipiscing elit. Quisque non elit mauris. Cras euismod, metus ac finibus finibus, felis dui suscipit purus, a maximus leo ligula at dolor. Morbi et malesuada purus. Phasellus a lacus sit amet urna tempor sollicitudin. Cras pretium tempor elit blandit egestas. Donec sed dignissim augue. Suspendisse ac vulputate leo. Cras aliquet nunc ac velit cursus viverra. In hac habitasse platea dictumst. Nam tortor urna, semper ac nulla id, porttitor semper felis. Phasellus blandit eros viverra, ultricies nibh nec, viverra ipsum. Ut nec gravida massa, eu convallis est. </a:t>
-            </a:r>
-          </a:p>
-          <a:p>
-            <a:pPr algn="just">
-              <a:lnSpc>
-                <a:spcPts val="3360"/>
-              </a:lnSpc>
-            </a:pPr>
-          </a:p>
+          <a:p/>
         </p:txBody>
       </p:sp>
       <p:sp>
@@ -3680,25 +3651,7 @@
             <a:spAutoFit/>
           </a:bodyPr>
           <a:lstStyle/>
-          <a:p>
-            <a:pPr algn="ctr">
-              <a:lnSpc>
-                <a:spcPts val="5494"/>
-              </a:lnSpc>
-            </a:pPr>
-            <a:r>
-              <a:rPr lang="en-US" sz="5232">
-                <a:solidFill>
-                  <a:srgbClr val="404C7D"/>
-                </a:solidFill>
-                <a:latin typeface="Alata"/>
-                <a:ea typeface="Alata"/>
-                <a:cs typeface="Alata"/>
-                <a:sym typeface="Alata"/>
-              </a:rPr>
-              <a:t>CONCLUSION</a:t>
-            </a:r>
-          </a:p>
+          <a:p/>
         </p:txBody>
       </p:sp>
     </p:spTree>
@@ -3784,6 +3737,10 @@
             </a:stretch>
           </a:blipFill>
         </p:spPr>
+        <p:txBody>
+          <a:bodyPr/>
+          <a:p/>
+        </p:txBody>
       </p:sp>
       <p:sp>
         <p:nvSpPr>
@@ -3836,6 +3793,10 @@
             </a:stretch>
           </a:blipFill>
         </p:spPr>
+        <p:txBody>
+          <a:bodyPr/>
+          <a:p/>
+        </p:txBody>
       </p:sp>
       <p:sp>
         <p:nvSpPr>
@@ -3888,6 +3849,10 @@
             </a:stretch>
           </a:blipFill>
         </p:spPr>
+        <p:txBody>
+          <a:bodyPr/>
+          <a:p/>
+        </p:txBody>
       </p:sp>
       <p:sp>
         <p:nvSpPr>
@@ -3940,6 +3905,10 @@
             </a:stretch>
           </a:blipFill>
         </p:spPr>
+        <p:txBody>
+          <a:bodyPr/>
+          <a:p/>
+        </p:txBody>
       </p:sp>
       <p:sp>
         <p:nvSpPr>
@@ -3961,25 +3930,7 @@
             <a:spAutoFit/>
           </a:bodyPr>
           <a:lstStyle/>
-          <a:p>
-            <a:pPr algn="ctr">
-              <a:lnSpc>
-                <a:spcPts val="12947"/>
-              </a:lnSpc>
-            </a:pPr>
-            <a:r>
-              <a:rPr lang="en-US" sz="12331">
-                <a:solidFill>
-                  <a:srgbClr val="404C7D"/>
-                </a:solidFill>
-                <a:latin typeface="Alata"/>
-                <a:ea typeface="Alata"/>
-                <a:cs typeface="Alata"/>
-                <a:sym typeface="Alata"/>
-              </a:rPr>
-              <a:t>THANK YOU </a:t>
-            </a:r>
-          </a:p>
+          <a:p/>
         </p:txBody>
       </p:sp>
     </p:spTree>
@@ -4065,6 +4016,10 @@
             </a:stretch>
           </a:blipFill>
         </p:spPr>
+        <p:txBody>
+          <a:bodyPr/>
+          <a:p/>
+        </p:txBody>
       </p:sp>
       <p:sp>
         <p:nvSpPr>
@@ -4117,6 +4072,10 @@
             </a:stretch>
           </a:blipFill>
         </p:spPr>
+        <p:txBody>
+          <a:bodyPr/>
+          <a:p/>
+        </p:txBody>
       </p:sp>
       <p:sp>
         <p:nvSpPr>
@@ -4169,6 +4128,10 @@
             </a:stretch>
           </a:blipFill>
         </p:spPr>
+        <p:txBody>
+          <a:bodyPr/>
+          <a:p/>
+        </p:txBody>
       </p:sp>
       <p:sp>
         <p:nvSpPr>
@@ -4221,6 +4184,10 @@
             </a:stretch>
           </a:blipFill>
         </p:spPr>
+        <p:txBody>
+          <a:bodyPr/>
+          <a:p/>
+        </p:txBody>
       </p:sp>
       <p:sp>
         <p:nvSpPr>
@@ -4242,32 +4209,7 @@
             <a:spAutoFit/>
           </a:bodyPr>
           <a:lstStyle/>
-          <a:p>
-            <a:pPr algn="just">
-              <a:lnSpc>
-                <a:spcPts val="3360"/>
-              </a:lnSpc>
-            </a:pPr>
-            <a:r>
-              <a:rPr lang="en-US" sz="3200">
-                <a:solidFill>
-                  <a:srgbClr val="404C7D"/>
-                </a:solidFill>
-                <a:latin typeface="Alata"/>
-                <a:ea typeface="Alata"/>
-                <a:cs typeface="Alata"/>
-                <a:sym typeface="Alata"/>
-              </a:rPr>
-              <a:t>Lorem ipsum dolor sit amet, consectetur adipiscing elit. Quisque non elit mauris. Cras euismod, metus ac finibus finibus, felis dui suscipit purus, a maximus leo ligula at dolor. Morbi et malesuada purus. Phasellus a lacus sit amet urna tempor sollicitudin. Cras pretium tempor elit blandit egestas. Donec sed dignissim augue. Suspendisse ac vulputate leo. Cras aliquet nunc ac velit cursus viverra. In hac habitasse platea dictumst. Nam tortor urna, semper ac nulla id, porttitor semper felis. Phasellus blandit eros viverra, ultricies nibh nec, viverra ipsum. Ut nec gravida massa, eu convallis est. Donec sed purus non ipsum cursus molestie sit amet nec lorem. Aliquam eget turpis eros. Duis elementum dolor a nisi gravida, sit amet laoreet lorem efficitur. </a:t>
-            </a:r>
-          </a:p>
-          <a:p>
-            <a:pPr algn="just">
-              <a:lnSpc>
-                <a:spcPts val="3360"/>
-              </a:lnSpc>
-            </a:pPr>
-          </a:p>
+          <a:p/>
         </p:txBody>
       </p:sp>
       <p:sp>
@@ -4290,25 +4232,7 @@
             <a:spAutoFit/>
           </a:bodyPr>
           <a:lstStyle/>
-          <a:p>
-            <a:pPr algn="ctr">
-              <a:lnSpc>
-                <a:spcPts val="5494"/>
-              </a:lnSpc>
-            </a:pPr>
-            <a:r>
-              <a:rPr lang="en-US" sz="5232">
-                <a:solidFill>
-                  <a:srgbClr val="404C7D"/>
-                </a:solidFill>
-                <a:latin typeface="Alata"/>
-                <a:ea typeface="Alata"/>
-                <a:cs typeface="Alata"/>
-                <a:sym typeface="Alata"/>
-              </a:rPr>
-              <a:t>INTRODOCUTION</a:t>
-            </a:r>
-          </a:p>
+          <a:p/>
         </p:txBody>
       </p:sp>
     </p:spTree>
@@ -4394,6 +4318,10 @@
             </a:stretch>
           </a:blipFill>
         </p:spPr>
+        <p:txBody>
+          <a:bodyPr/>
+          <a:p/>
+        </p:txBody>
       </p:sp>
       <p:sp>
         <p:nvSpPr>
@@ -4446,6 +4374,10 @@
             </a:stretch>
           </a:blipFill>
         </p:spPr>
+        <p:txBody>
+          <a:bodyPr/>
+          <a:p/>
+        </p:txBody>
       </p:sp>
       <p:sp>
         <p:nvSpPr>
@@ -4498,6 +4430,10 @@
             </a:stretch>
           </a:blipFill>
         </p:spPr>
+        <p:txBody>
+          <a:bodyPr/>
+          <a:p/>
+        </p:txBody>
       </p:sp>
       <p:sp>
         <p:nvSpPr>
@@ -4550,6 +4486,10 @@
             </a:stretch>
           </a:blipFill>
         </p:spPr>
+        <p:txBody>
+          <a:bodyPr/>
+          <a:p/>
+        </p:txBody>
       </p:sp>
       <p:sp>
         <p:nvSpPr>
@@ -4571,58 +4511,7 @@
             <a:spAutoFit/>
           </a:bodyPr>
           <a:lstStyle/>
-          <a:p>
-            <a:pPr algn="just">
-              <a:lnSpc>
-                <a:spcPts val="3360"/>
-              </a:lnSpc>
-            </a:pPr>
-            <a:r>
-              <a:rPr lang="en-US" sz="3200">
-                <a:solidFill>
-                  <a:srgbClr val="404C7D"/>
-                </a:solidFill>
-                <a:latin typeface="Alata"/>
-                <a:ea typeface="Alata"/>
-                <a:cs typeface="Alata"/>
-                <a:sym typeface="Alata"/>
-              </a:rPr>
-              <a:t>Lorem ipsum dolor sit amet, consectetur adipiscing elit. Quisque non elit mauris. Cras euismod, metus ac finibus finibus, felis dui suscipit purus, a maximus leo ligula at dolor. Morbi et malesuada purus. Phasellus a lacus sit amet urna tempor sollicitudin. Cras pretium tempor elit blandit egestas. Donec sed dignissim augue. Suspendisse ac vulputate leo. Cras aliquet nunc ac velit cursus viverra. </a:t>
-            </a:r>
-          </a:p>
-          <a:p>
-            <a:pPr algn="just">
-              <a:lnSpc>
-                <a:spcPts val="3360"/>
-              </a:lnSpc>
-            </a:pPr>
-          </a:p>
-          <a:p>
-            <a:pPr algn="just">
-              <a:lnSpc>
-                <a:spcPts val="3360"/>
-              </a:lnSpc>
-            </a:pPr>
-            <a:r>
-              <a:rPr lang="en-US" sz="3200">
-                <a:solidFill>
-                  <a:srgbClr val="404C7D"/>
-                </a:solidFill>
-                <a:latin typeface="Alata"/>
-                <a:ea typeface="Alata"/>
-                <a:cs typeface="Alata"/>
-                <a:sym typeface="Alata"/>
-              </a:rPr>
-              <a:t>In hac habitasse platea dictumst. Nam tortor urna, semper ac nulla id, porttitor semper felis. Phasellus blandit eros viverra, ultricies nibh nec, viverra ipsum. Ut nec gravida massa, eu convallis est. Donec sed purus non ipsum cursus molestie sit amet nec lorem. Aliquam eget turpis eros. Duis elementum dolor a nisi gravida, sit amet laoreet lorem efficitur. </a:t>
-            </a:r>
-          </a:p>
-          <a:p>
-            <a:pPr algn="just">
-              <a:lnSpc>
-                <a:spcPts val="3360"/>
-              </a:lnSpc>
-            </a:pPr>
-          </a:p>
+          <a:p/>
         </p:txBody>
       </p:sp>
       <p:sp>
@@ -4645,25 +4534,7 @@
             <a:spAutoFit/>
           </a:bodyPr>
           <a:lstStyle/>
-          <a:p>
-            <a:pPr algn="ctr">
-              <a:lnSpc>
-                <a:spcPts val="5494"/>
-              </a:lnSpc>
-            </a:pPr>
-            <a:r>
-              <a:rPr lang="en-US" sz="5232">
-                <a:solidFill>
-                  <a:srgbClr val="404C7D"/>
-                </a:solidFill>
-                <a:latin typeface="Alata"/>
-                <a:ea typeface="Alata"/>
-                <a:cs typeface="Alata"/>
-                <a:sym typeface="Alata"/>
-              </a:rPr>
-              <a:t>BACKGROUND</a:t>
-            </a:r>
-          </a:p>
+          <a:p/>
         </p:txBody>
       </p:sp>
     </p:spTree>
@@ -4749,6 +4620,10 @@
             </a:stretch>
           </a:blipFill>
         </p:spPr>
+        <p:txBody>
+          <a:bodyPr/>
+          <a:p/>
+        </p:txBody>
       </p:sp>
       <p:sp>
         <p:nvSpPr>
@@ -4801,6 +4676,10 @@
             </a:stretch>
           </a:blipFill>
         </p:spPr>
+        <p:txBody>
+          <a:bodyPr/>
+          <a:p/>
+        </p:txBody>
       </p:sp>
       <p:sp>
         <p:nvSpPr>
@@ -4853,6 +4732,10 @@
             </a:stretch>
           </a:blipFill>
         </p:spPr>
+        <p:txBody>
+          <a:bodyPr/>
+          <a:p/>
+        </p:txBody>
       </p:sp>
       <p:sp>
         <p:nvSpPr>
@@ -4905,6 +4788,10 @@
             </a:stretch>
           </a:blipFill>
         </p:spPr>
+        <p:txBody>
+          <a:bodyPr/>
+          <a:p/>
+        </p:txBody>
       </p:sp>
       <p:sp>
         <p:nvSpPr>
@@ -4926,25 +4813,7 @@
             <a:spAutoFit/>
           </a:bodyPr>
           <a:lstStyle/>
-          <a:p>
-            <a:pPr algn="just">
-              <a:lnSpc>
-                <a:spcPts val="3360"/>
-              </a:lnSpc>
-            </a:pPr>
-            <a:r>
-              <a:rPr lang="en-US" sz="3200">
-                <a:solidFill>
-                  <a:srgbClr val="404C7D"/>
-                </a:solidFill>
-                <a:latin typeface="Alata"/>
-                <a:ea typeface="Alata"/>
-                <a:cs typeface="Alata"/>
-                <a:sym typeface="Alata"/>
-              </a:rPr>
-              <a:t>Lorem ipsum dolor sit amet, consectetur adipiscing elit. Quisque non elit mauris. Cras euismod, metus ac finibus finibus, felis dui suscipit purus, a maximus leo ligula at dolor. Morbi et malesuada purus. Phasellus a lacus sit amet urna tempor sollicitudin. Cras pretium tempor elit blandit egestas. Donec sed dignissim augue. Suspendisse ac vulputate leo. Cras aliquet nunc ac velit cursus viverra. </a:t>
-            </a:r>
-          </a:p>
+          <a:p/>
         </p:txBody>
       </p:sp>
       <p:sp>
@@ -4967,25 +4836,7 @@
             <a:spAutoFit/>
           </a:bodyPr>
           <a:lstStyle/>
-          <a:p>
-            <a:pPr algn="ctr">
-              <a:lnSpc>
-                <a:spcPts val="5494"/>
-              </a:lnSpc>
-            </a:pPr>
-            <a:r>
-              <a:rPr lang="en-US" sz="5232">
-                <a:solidFill>
-                  <a:srgbClr val="404C7D"/>
-                </a:solidFill>
-                <a:latin typeface="Alata"/>
-                <a:ea typeface="Alata"/>
-                <a:cs typeface="Alata"/>
-                <a:sym typeface="Alata"/>
-              </a:rPr>
-              <a:t>OVERVIEW</a:t>
-            </a:r>
-          </a:p>
+          <a:p/>
         </p:txBody>
       </p:sp>
       <p:sp>
@@ -5008,25 +4859,7 @@
             <a:spAutoFit/>
           </a:bodyPr>
           <a:lstStyle/>
-          <a:p>
-            <a:pPr algn="just">
-              <a:lnSpc>
-                <a:spcPts val="3360"/>
-              </a:lnSpc>
-            </a:pPr>
-            <a:r>
-              <a:rPr lang="en-US" sz="3200">
-                <a:solidFill>
-                  <a:srgbClr val="404C7D"/>
-                </a:solidFill>
-                <a:latin typeface="Alata"/>
-                <a:ea typeface="Alata"/>
-                <a:cs typeface="Alata"/>
-                <a:sym typeface="Alata"/>
-              </a:rPr>
-              <a:t>Lorem ipsum dolor sit amet, consectetur adipiscing elit. Quisque non elit mauris. Cras euismod, metus ac finibus finibus, felis dui suscipit purus, a maximus leo ligula at dolor. Morbi et malesuada purus. Phasellus a lacus sit amet urna tempor sollicitudin. Cras pretium tempor elit blandit egestas. Donec sed dignissim augue. Suspendisse ac vulputate leo. Cras aliquet nunc ac velit cursus viverra. </a:t>
-            </a:r>
-          </a:p>
+          <a:p/>
         </p:txBody>
       </p:sp>
     </p:spTree>
@@ -5112,6 +4945,10 @@
             </a:stretch>
           </a:blipFill>
         </p:spPr>
+        <p:txBody>
+          <a:bodyPr/>
+          <a:p/>
+        </p:txBody>
       </p:sp>
       <p:sp>
         <p:nvSpPr>
@@ -5164,6 +5001,10 @@
             </a:stretch>
           </a:blipFill>
         </p:spPr>
+        <p:txBody>
+          <a:bodyPr/>
+          <a:p/>
+        </p:txBody>
       </p:sp>
       <p:sp>
         <p:nvSpPr>
@@ -5216,6 +5057,10 @@
             </a:stretch>
           </a:blipFill>
         </p:spPr>
+        <p:txBody>
+          <a:bodyPr/>
+          <a:p/>
+        </p:txBody>
       </p:sp>
       <p:sp>
         <p:nvSpPr>
@@ -5268,6 +5113,10 @@
             </a:stretch>
           </a:blipFill>
         </p:spPr>
+        <p:txBody>
+          <a:bodyPr/>
+          <a:p/>
+        </p:txBody>
       </p:sp>
       <p:sp>
         <p:nvSpPr>
@@ -5289,27 +5138,7 @@
             <a:spAutoFit/>
           </a:bodyPr>
           <a:lstStyle/>
-          <a:p>
-            <a:pPr algn="just" marL="690881" indent="-345440" lvl="1">
-              <a:lnSpc>
-                <a:spcPts val="3360"/>
-              </a:lnSpc>
-              <a:buFont typeface="Arial"/>
-              <a:buChar char="•"/>
-            </a:pPr>
-            <a:r>
-              <a:rPr lang="en-US" sz="3200">
-                <a:solidFill>
-                  <a:srgbClr val="404C7D"/>
-                </a:solidFill>
-                <a:latin typeface="Alata"/>
-                <a:ea typeface="Alata"/>
-                <a:cs typeface="Alata"/>
-                <a:sym typeface="Alata"/>
-              </a:rPr>
-              <a:t>Lorem ipsum dolor sit amet, consectetur adipiscing elit. Quisque non elit mauris. Cras euismod, metus ac finibus finibus, felis dui suscipit purus, a maximus leo ligula at dolor. Morbi et malesuada purus. Phasellus a lacus sit amet urna tempor sollicitudin. Cras pretium tempor elit blandit egestas. Donec sed dignissim augue. </a:t>
-            </a:r>
-          </a:p>
+          <a:p/>
         </p:txBody>
       </p:sp>
       <p:sp>
@@ -5332,25 +5161,7 @@
             <a:spAutoFit/>
           </a:bodyPr>
           <a:lstStyle/>
-          <a:p>
-            <a:pPr algn="ctr">
-              <a:lnSpc>
-                <a:spcPts val="5494"/>
-              </a:lnSpc>
-            </a:pPr>
-            <a:r>
-              <a:rPr lang="en-US" sz="5232">
-                <a:solidFill>
-                  <a:srgbClr val="404C7D"/>
-                </a:solidFill>
-                <a:latin typeface="Alata"/>
-                <a:ea typeface="Alata"/>
-                <a:cs typeface="Alata"/>
-                <a:sym typeface="Alata"/>
-              </a:rPr>
-              <a:t>PROBLEM</a:t>
-            </a:r>
-          </a:p>
+          <a:p/>
         </p:txBody>
       </p:sp>
       <p:sp>
@@ -5373,27 +5184,7 @@
             <a:spAutoFit/>
           </a:bodyPr>
           <a:lstStyle/>
-          <a:p>
-            <a:pPr algn="just" marL="690881" indent="-345440" lvl="1">
-              <a:lnSpc>
-                <a:spcPts val="3360"/>
-              </a:lnSpc>
-              <a:buFont typeface="Arial"/>
-              <a:buChar char="•"/>
-            </a:pPr>
-            <a:r>
-              <a:rPr lang="en-US" sz="3200">
-                <a:solidFill>
-                  <a:srgbClr val="404C7D"/>
-                </a:solidFill>
-                <a:latin typeface="Alata"/>
-                <a:ea typeface="Alata"/>
-                <a:cs typeface="Alata"/>
-                <a:sym typeface="Alata"/>
-              </a:rPr>
-              <a:t>Lorem ipsum dolor sit amet, consectetur adipiscing elit. Quisque non elit mauris. Cras euismod, metus ac finibus finibus, felis dui suscipit purus, a maximus leo ligula at dolor. Morbi et malesuada purus. Phasellus a lacus sit amet urna tempor sollicitudin. Cras pretium tempor elit blandit egestas. Donec sed dignissim augue. </a:t>
-            </a:r>
-          </a:p>
+          <a:p/>
         </p:txBody>
       </p:sp>
     </p:spTree>
@@ -5479,6 +5270,10 @@
             </a:stretch>
           </a:blipFill>
         </p:spPr>
+        <p:txBody>
+          <a:bodyPr/>
+          <a:p/>
+        </p:txBody>
       </p:sp>
       <p:sp>
         <p:nvSpPr>
@@ -5531,6 +5326,10 @@
             </a:stretch>
           </a:blipFill>
         </p:spPr>
+        <p:txBody>
+          <a:bodyPr/>
+          <a:p/>
+        </p:txBody>
       </p:sp>
       <p:sp>
         <p:nvSpPr>
@@ -5583,6 +5382,10 @@
             </a:stretch>
           </a:blipFill>
         </p:spPr>
+        <p:txBody>
+          <a:bodyPr/>
+          <a:p/>
+        </p:txBody>
       </p:sp>
       <p:sp>
         <p:nvSpPr>
@@ -5635,6 +5438,10 @@
             </a:stretch>
           </a:blipFill>
         </p:spPr>
+        <p:txBody>
+          <a:bodyPr/>
+          <a:p/>
+        </p:txBody>
       </p:sp>
       <p:sp>
         <p:nvSpPr>
@@ -5687,6 +5494,10 @@
             </a:stretch>
           </a:blipFill>
         </p:spPr>
+        <p:txBody>
+          <a:bodyPr/>
+          <a:p/>
+        </p:txBody>
       </p:sp>
       <p:sp>
         <p:nvSpPr>
@@ -5708,25 +5519,7 @@
             <a:spAutoFit/>
           </a:bodyPr>
           <a:lstStyle/>
-          <a:p>
-            <a:pPr algn="just">
-              <a:lnSpc>
-                <a:spcPts val="3360"/>
-              </a:lnSpc>
-            </a:pPr>
-            <a:r>
-              <a:rPr lang="en-US" sz="3200">
-                <a:solidFill>
-                  <a:srgbClr val="404C7D"/>
-                </a:solidFill>
-                <a:latin typeface="Alata"/>
-                <a:ea typeface="Alata"/>
-                <a:cs typeface="Alata"/>
-                <a:sym typeface="Alata"/>
-              </a:rPr>
-              <a:t>Lorem ipsum dolor sit amet, consectetur adipiscing elit. Quisque non elit mauris. Cras euismod, metus ac finibus finibus, felis dui suscipit purus, a maximus leo ligula at dolor. Morbi et malesuada purus. </a:t>
-            </a:r>
-          </a:p>
+          <a:p/>
         </p:txBody>
       </p:sp>
       <p:sp>
@@ -5749,25 +5542,7 @@
             <a:spAutoFit/>
           </a:bodyPr>
           <a:lstStyle/>
-          <a:p>
-            <a:pPr algn="ctr">
-              <a:lnSpc>
-                <a:spcPts val="5494"/>
-              </a:lnSpc>
-            </a:pPr>
-            <a:r>
-              <a:rPr lang="en-US" sz="5232">
-                <a:solidFill>
-                  <a:srgbClr val="404C7D"/>
-                </a:solidFill>
-                <a:latin typeface="Alata"/>
-                <a:ea typeface="Alata"/>
-                <a:cs typeface="Alata"/>
-                <a:sym typeface="Alata"/>
-              </a:rPr>
-              <a:t>OBJECTIVES</a:t>
-            </a:r>
-          </a:p>
+          <a:p/>
         </p:txBody>
       </p:sp>
       <p:sp>
@@ -5790,25 +5565,7 @@
             <a:spAutoFit/>
           </a:bodyPr>
           <a:lstStyle/>
-          <a:p>
-            <a:pPr algn="just">
-              <a:lnSpc>
-                <a:spcPts val="3360"/>
-              </a:lnSpc>
-            </a:pPr>
-            <a:r>
-              <a:rPr lang="en-US" sz="3200">
-                <a:solidFill>
-                  <a:srgbClr val="404C7D"/>
-                </a:solidFill>
-                <a:latin typeface="Alata"/>
-                <a:ea typeface="Alata"/>
-                <a:cs typeface="Alata"/>
-                <a:sym typeface="Alata"/>
-              </a:rPr>
-              <a:t>Lorem ipsum dolor sit amet, consectetur adipiscing elit. Quisque non elit mauris. Cras euismod, metus ac finibus finibus, felis dui suscipit purus, a maximus leo ligula at dolor. Morbi et malesuada purus. </a:t>
-            </a:r>
-          </a:p>
+          <a:p/>
         </p:txBody>
       </p:sp>
     </p:spTree>
@@ -5894,6 +5651,10 @@
             </a:stretch>
           </a:blipFill>
         </p:spPr>
+        <p:txBody>
+          <a:bodyPr/>
+          <a:p/>
+        </p:txBody>
       </p:sp>
       <p:sp>
         <p:nvSpPr>
@@ -5946,6 +5707,10 @@
             </a:stretch>
           </a:blipFill>
         </p:spPr>
+        <p:txBody>
+          <a:bodyPr/>
+          <a:p/>
+        </p:txBody>
       </p:sp>
       <p:sp>
         <p:nvSpPr>
@@ -5998,6 +5763,10 @@
             </a:stretch>
           </a:blipFill>
         </p:spPr>
+        <p:txBody>
+          <a:bodyPr/>
+          <a:p/>
+        </p:txBody>
       </p:sp>
       <p:sp>
         <p:nvSpPr>
@@ -6050,6 +5819,10 @@
             </a:stretch>
           </a:blipFill>
         </p:spPr>
+        <p:txBody>
+          <a:bodyPr/>
+          <a:p/>
+        </p:txBody>
       </p:sp>
       <p:sp>
         <p:nvSpPr>
@@ -6102,6 +5875,10 @@
             </a:stretch>
           </a:blipFill>
         </p:spPr>
+        <p:txBody>
+          <a:bodyPr/>
+          <a:p/>
+        </p:txBody>
       </p:sp>
       <p:sp>
         <p:nvSpPr>
@@ -6123,27 +5900,7 @@
             <a:spAutoFit/>
           </a:bodyPr>
           <a:lstStyle/>
-          <a:p>
-            <a:pPr algn="just" marL="690881" indent="-345440" lvl="1">
-              <a:lnSpc>
-                <a:spcPts val="3360"/>
-              </a:lnSpc>
-              <a:buFont typeface="Arial"/>
-              <a:buChar char="•"/>
-            </a:pPr>
-            <a:r>
-              <a:rPr lang="en-US" sz="3200">
-                <a:solidFill>
-                  <a:srgbClr val="404C7D"/>
-                </a:solidFill>
-                <a:latin typeface="Alata"/>
-                <a:ea typeface="Alata"/>
-                <a:cs typeface="Alata"/>
-                <a:sym typeface="Alata"/>
-              </a:rPr>
-              <a:t>Lorem ipsum dolor sit amet, consectetur adipiscing elit. Quisque non elit mauris. Cras euismod, metus ac finibus finibus.</a:t>
-            </a:r>
-          </a:p>
+          <a:p/>
         </p:txBody>
       </p:sp>
       <p:sp>
@@ -6166,25 +5923,7 @@
             <a:spAutoFit/>
           </a:bodyPr>
           <a:lstStyle/>
-          <a:p>
-            <a:pPr algn="ctr">
-              <a:lnSpc>
-                <a:spcPts val="5494"/>
-              </a:lnSpc>
-            </a:pPr>
-            <a:r>
-              <a:rPr lang="en-US" sz="5232">
-                <a:solidFill>
-                  <a:srgbClr val="404C7D"/>
-                </a:solidFill>
-                <a:latin typeface="Alata"/>
-                <a:ea typeface="Alata"/>
-                <a:cs typeface="Alata"/>
-                <a:sym typeface="Alata"/>
-              </a:rPr>
-              <a:t>STRATEGY</a:t>
-            </a:r>
-          </a:p>
+          <a:p/>
         </p:txBody>
       </p:sp>
       <p:sp>
@@ -6207,27 +5946,7 @@
             <a:spAutoFit/>
           </a:bodyPr>
           <a:lstStyle/>
-          <a:p>
-            <a:pPr algn="just" marL="690881" indent="-345440" lvl="1">
-              <a:lnSpc>
-                <a:spcPts val="3360"/>
-              </a:lnSpc>
-              <a:buFont typeface="Arial"/>
-              <a:buChar char="•"/>
-            </a:pPr>
-            <a:r>
-              <a:rPr lang="en-US" sz="3200">
-                <a:solidFill>
-                  <a:srgbClr val="404C7D"/>
-                </a:solidFill>
-                <a:latin typeface="Alata"/>
-                <a:ea typeface="Alata"/>
-                <a:cs typeface="Alata"/>
-                <a:sym typeface="Alata"/>
-              </a:rPr>
-              <a:t>Lorem ipsum dolor sit amet, consectetur adipiscing elit. Quisque non elit mauris. Cras euismod, metus ac finibus finibus.</a:t>
-            </a:r>
-          </a:p>
+          <a:p/>
         </p:txBody>
       </p:sp>
       <p:sp>
@@ -6250,27 +5969,7 @@
             <a:spAutoFit/>
           </a:bodyPr>
           <a:lstStyle/>
-          <a:p>
-            <a:pPr algn="just" marL="690881" indent="-345440" lvl="1">
-              <a:lnSpc>
-                <a:spcPts val="3360"/>
-              </a:lnSpc>
-              <a:buFont typeface="Arial"/>
-              <a:buChar char="•"/>
-            </a:pPr>
-            <a:r>
-              <a:rPr lang="en-US" sz="3200">
-                <a:solidFill>
-                  <a:srgbClr val="404C7D"/>
-                </a:solidFill>
-                <a:latin typeface="Alata"/>
-                <a:ea typeface="Alata"/>
-                <a:cs typeface="Alata"/>
-                <a:sym typeface="Alata"/>
-              </a:rPr>
-              <a:t>Lorem ipsum dolor sit amet, consectetur adipiscing elit. Quisque non elit mauris. Cras euismod, metus ac finibus finibus.</a:t>
-            </a:r>
-          </a:p>
+          <a:p/>
         </p:txBody>
       </p:sp>
     </p:spTree>
@@ -6356,6 +6055,10 @@
             </a:stretch>
           </a:blipFill>
         </p:spPr>
+        <p:txBody>
+          <a:bodyPr/>
+          <a:p/>
+        </p:txBody>
       </p:sp>
       <p:sp>
         <p:nvSpPr>
@@ -6408,6 +6111,10 @@
             </a:stretch>
           </a:blipFill>
         </p:spPr>
+        <p:txBody>
+          <a:bodyPr/>
+          <a:p/>
+        </p:txBody>
       </p:sp>
       <p:sp>
         <p:nvSpPr>
@@ -6460,6 +6167,10 @@
             </a:stretch>
           </a:blipFill>
         </p:spPr>
+        <p:txBody>
+          <a:bodyPr/>
+          <a:p/>
+        </p:txBody>
       </p:sp>
       <p:sp>
         <p:nvSpPr>
@@ -6512,6 +6223,10 @@
             </a:stretch>
           </a:blipFill>
         </p:spPr>
+        <p:txBody>
+          <a:bodyPr/>
+          <a:p/>
+        </p:txBody>
       </p:sp>
       <p:sp>
         <p:nvSpPr>
@@ -6533,27 +6248,7 @@
             <a:spAutoFit/>
           </a:bodyPr>
           <a:lstStyle/>
-          <a:p>
-            <a:pPr algn="just" marL="690881" indent="-345440" lvl="1">
-              <a:lnSpc>
-                <a:spcPts val="3360"/>
-              </a:lnSpc>
-              <a:buFont typeface="Arial"/>
-              <a:buChar char="•"/>
-            </a:pPr>
-            <a:r>
-              <a:rPr lang="en-US" sz="3200">
-                <a:solidFill>
-                  <a:srgbClr val="404C7D"/>
-                </a:solidFill>
-                <a:latin typeface="Alata"/>
-                <a:ea typeface="Alata"/>
-                <a:cs typeface="Alata"/>
-                <a:sym typeface="Alata"/>
-              </a:rPr>
-              <a:t>Lorem ipsum dolor sit amet, consectetur adipiscing elit. Quisque non elit mauris. Cras euismod, metus ac finibus finibus.</a:t>
-            </a:r>
-          </a:p>
+          <a:p/>
         </p:txBody>
       </p:sp>
       <p:sp>
@@ -6576,25 +6271,7 @@
             <a:spAutoFit/>
           </a:bodyPr>
           <a:lstStyle/>
-          <a:p>
-            <a:pPr algn="ctr">
-              <a:lnSpc>
-                <a:spcPts val="5494"/>
-              </a:lnSpc>
-            </a:pPr>
-            <a:r>
-              <a:rPr lang="en-US" sz="5232">
-                <a:solidFill>
-                  <a:srgbClr val="404C7D"/>
-                </a:solidFill>
-                <a:latin typeface="Alata"/>
-                <a:ea typeface="Alata"/>
-                <a:cs typeface="Alata"/>
-                <a:sym typeface="Alata"/>
-              </a:rPr>
-              <a:t>INSIGHT</a:t>
-            </a:r>
-          </a:p>
+          <a:p/>
         </p:txBody>
       </p:sp>
       <p:sp>
@@ -6617,27 +6294,7 @@
             <a:spAutoFit/>
           </a:bodyPr>
           <a:lstStyle/>
-          <a:p>
-            <a:pPr algn="just" marL="690881" indent="-345440" lvl="1">
-              <a:lnSpc>
-                <a:spcPts val="3360"/>
-              </a:lnSpc>
-              <a:buFont typeface="Arial"/>
-              <a:buChar char="•"/>
-            </a:pPr>
-            <a:r>
-              <a:rPr lang="en-US" sz="3200">
-                <a:solidFill>
-                  <a:srgbClr val="404C7D"/>
-                </a:solidFill>
-                <a:latin typeface="Alata"/>
-                <a:ea typeface="Alata"/>
-                <a:cs typeface="Alata"/>
-                <a:sym typeface="Alata"/>
-              </a:rPr>
-              <a:t>Lorem ipsum dolor sit amet, consectetur adipiscing elit. Quisque non elit mauris. Cras euismod, metus ac finibus finibus.</a:t>
-            </a:r>
-          </a:p>
+          <a:p/>
         </p:txBody>
       </p:sp>
       <p:sp>
@@ -6660,27 +6317,7 @@
             <a:spAutoFit/>
           </a:bodyPr>
           <a:lstStyle/>
-          <a:p>
-            <a:pPr algn="just" marL="690881" indent="-345440" lvl="1">
-              <a:lnSpc>
-                <a:spcPts val="3360"/>
-              </a:lnSpc>
-              <a:buFont typeface="Arial"/>
-              <a:buChar char="•"/>
-            </a:pPr>
-            <a:r>
-              <a:rPr lang="en-US" sz="3200">
-                <a:solidFill>
-                  <a:srgbClr val="404C7D"/>
-                </a:solidFill>
-                <a:latin typeface="Alata"/>
-                <a:ea typeface="Alata"/>
-                <a:cs typeface="Alata"/>
-                <a:sym typeface="Alata"/>
-              </a:rPr>
-              <a:t>Lorem ipsum dolor sit amet, consectetur adipiscing elit. Quisque non elit mauris. Cras euismod, metus ac finibus finibus.</a:t>
-            </a:r>
-          </a:p>
+          <a:p/>
         </p:txBody>
       </p:sp>
       <p:sp>
@@ -6703,27 +6340,7 @@
             <a:spAutoFit/>
           </a:bodyPr>
           <a:lstStyle/>
-          <a:p>
-            <a:pPr algn="just" marL="690881" indent="-345440" lvl="1">
-              <a:lnSpc>
-                <a:spcPts val="3360"/>
-              </a:lnSpc>
-              <a:buFont typeface="Arial"/>
-              <a:buChar char="•"/>
-            </a:pPr>
-            <a:r>
-              <a:rPr lang="en-US" sz="3200">
-                <a:solidFill>
-                  <a:srgbClr val="404C7D"/>
-                </a:solidFill>
-                <a:latin typeface="Alata"/>
-                <a:ea typeface="Alata"/>
-                <a:cs typeface="Alata"/>
-                <a:sym typeface="Alata"/>
-              </a:rPr>
-              <a:t>Lorem ipsum dolor sit amet, consectetur adipiscing elit. Quisque non elit mauris. Cras euismod, metus ac finibus finibus.</a:t>
-            </a:r>
-          </a:p>
+          <a:p/>
         </p:txBody>
       </p:sp>
     </p:spTree>
@@ -6809,6 +6426,10 @@
             </a:stretch>
           </a:blipFill>
         </p:spPr>
+        <p:txBody>
+          <a:bodyPr/>
+          <a:p/>
+        </p:txBody>
       </p:sp>
       <p:sp>
         <p:nvSpPr>
@@ -6861,6 +6482,10 @@
             </a:stretch>
           </a:blipFill>
         </p:spPr>
+        <p:txBody>
+          <a:bodyPr/>
+          <a:p/>
+        </p:txBody>
       </p:sp>
       <p:sp>
         <p:nvSpPr>
@@ -6913,6 +6538,10 @@
             </a:stretch>
           </a:blipFill>
         </p:spPr>
+        <p:txBody>
+          <a:bodyPr/>
+          <a:p/>
+        </p:txBody>
       </p:sp>
       <p:sp>
         <p:nvSpPr>
@@ -6965,6 +6594,10 @@
             </a:stretch>
           </a:blipFill>
         </p:spPr>
+        <p:txBody>
+          <a:bodyPr/>
+          <a:p/>
+        </p:txBody>
       </p:sp>
       <p:sp>
         <p:nvSpPr>
@@ -6986,27 +6619,7 @@
             <a:spAutoFit/>
           </a:bodyPr>
           <a:lstStyle/>
-          <a:p>
-            <a:pPr algn="just" marL="690881" indent="-345440" lvl="1">
-              <a:lnSpc>
-                <a:spcPts val="3360"/>
-              </a:lnSpc>
-              <a:buFont typeface="Arial"/>
-              <a:buChar char="•"/>
-            </a:pPr>
-            <a:r>
-              <a:rPr lang="en-US" sz="3200">
-                <a:solidFill>
-                  <a:srgbClr val="404C7D"/>
-                </a:solidFill>
-                <a:latin typeface="Alata"/>
-                <a:ea typeface="Alata"/>
-                <a:cs typeface="Alata"/>
-                <a:sym typeface="Alata"/>
-              </a:rPr>
-              <a:t>Lorem ipsum dolor sit amet, consectetur adipiscing elit. Quisque non elit mauris. Cras euismod, metus ac finibus finibus.</a:t>
-            </a:r>
-          </a:p>
+          <a:p/>
         </p:txBody>
       </p:sp>
       <p:sp>
@@ -7029,25 +6642,7 @@
             <a:spAutoFit/>
           </a:bodyPr>
           <a:lstStyle/>
-          <a:p>
-            <a:pPr algn="ctr">
-              <a:lnSpc>
-                <a:spcPts val="5494"/>
-              </a:lnSpc>
-            </a:pPr>
-            <a:r>
-              <a:rPr lang="en-US" sz="5232">
-                <a:solidFill>
-                  <a:srgbClr val="404C7D"/>
-                </a:solidFill>
-                <a:latin typeface="Alata"/>
-                <a:ea typeface="Alata"/>
-                <a:cs typeface="Alata"/>
-                <a:sym typeface="Alata"/>
-              </a:rPr>
-              <a:t>SOLUTION</a:t>
-            </a:r>
-          </a:p>
+          <a:p/>
         </p:txBody>
       </p:sp>
       <p:sp>
@@ -7070,27 +6665,7 @@
             <a:spAutoFit/>
           </a:bodyPr>
           <a:lstStyle/>
-          <a:p>
-            <a:pPr algn="just" marL="690881" indent="-345440" lvl="1">
-              <a:lnSpc>
-                <a:spcPts val="3360"/>
-              </a:lnSpc>
-              <a:buFont typeface="Arial"/>
-              <a:buChar char="•"/>
-            </a:pPr>
-            <a:r>
-              <a:rPr lang="en-US" sz="3200">
-                <a:solidFill>
-                  <a:srgbClr val="404C7D"/>
-                </a:solidFill>
-                <a:latin typeface="Alata"/>
-                <a:ea typeface="Alata"/>
-                <a:cs typeface="Alata"/>
-                <a:sym typeface="Alata"/>
-              </a:rPr>
-              <a:t>Lorem ipsum dolor sit amet, consectetur adipiscing elit. Quisque non elit mauris. Cras euismod, metus ac finibus finibus.</a:t>
-            </a:r>
-          </a:p>
+          <a:p/>
         </p:txBody>
       </p:sp>
       <p:sp>
@@ -7113,27 +6688,7 @@
             <a:spAutoFit/>
           </a:bodyPr>
           <a:lstStyle/>
-          <a:p>
-            <a:pPr algn="just" marL="690881" indent="-345440" lvl="1">
-              <a:lnSpc>
-                <a:spcPts val="3360"/>
-              </a:lnSpc>
-              <a:buFont typeface="Arial"/>
-              <a:buChar char="•"/>
-            </a:pPr>
-            <a:r>
-              <a:rPr lang="en-US" sz="3200">
-                <a:solidFill>
-                  <a:srgbClr val="404C7D"/>
-                </a:solidFill>
-                <a:latin typeface="Alata"/>
-                <a:ea typeface="Alata"/>
-                <a:cs typeface="Alata"/>
-                <a:sym typeface="Alata"/>
-              </a:rPr>
-              <a:t>Lorem ipsum dolor sit amet, consectetur adipiscing elit. Quisque non elit mauris. Cras euismod, metus ac finibus finibus.</a:t>
-            </a:r>
-          </a:p>
+          <a:p/>
         </p:txBody>
       </p:sp>
       <p:sp>
@@ -7156,27 +6711,7 @@
             <a:spAutoFit/>
           </a:bodyPr>
           <a:lstStyle/>
-          <a:p>
-            <a:pPr algn="just" marL="690881" indent="-345440" lvl="1">
-              <a:lnSpc>
-                <a:spcPts val="3360"/>
-              </a:lnSpc>
-              <a:buFont typeface="Arial"/>
-              <a:buChar char="•"/>
-            </a:pPr>
-            <a:r>
-              <a:rPr lang="en-US" sz="3200">
-                <a:solidFill>
-                  <a:srgbClr val="404C7D"/>
-                </a:solidFill>
-                <a:latin typeface="Alata"/>
-                <a:ea typeface="Alata"/>
-                <a:cs typeface="Alata"/>
-                <a:sym typeface="Alata"/>
-              </a:rPr>
-              <a:t>Lorem ipsum dolor sit amet, consectetur adipiscing elit. Quisque non elit mauris. Cras euismod, metus ac finibus finibus.</a:t>
-            </a:r>
-          </a:p>
+          <a:p/>
         </p:txBody>
       </p:sp>
     </p:spTree>
